--- a/curso/pptx/S14.pptx
+++ b/curso/pptx/S14.pptx
@@ -3892,8 +3892,8 @@
         </p:nvSpPr>
         <p:spPr>
           <a:xfrm>
-            <a:off x="640000" y="420000"/>
-            <a:ext cx="10912000" cy="420000"/>
+            <a:off x="10652000" y="380000"/>
+            <a:ext cx="900000" cy="800000"/>
           </a:xfrm>
           <a:prstGeom prst="rect">
             <a:avLst/>
@@ -3908,17 +3908,17 @@
           <a:p>
             <a:pPr>
               <a:spcAft>
-                <a:spcPts val="810"/>
-              </a:spcAft>
-            </a:pPr>
-            <a:r>
-              <a:rPr sz="1800" b="1">
+                <a:spcPts val="1980"/>
+              </a:spcAft>
+            </a:pPr>
+            <a:r>
+              <a:rPr sz="4400" b="0">
                 <a:solidFill>
                   <a:srgbClr val="1F2A44"/>
                 </a:solidFill>
                 <a:latin typeface="Nunito Sans"/>
               </a:rPr>
-              <a:t>🦉 Aula de Filosofía</a:t>
+              <a:t>🙃</a:t>
             </a:r>
           </a:p>
         </p:txBody>

--- a/curso/pptx/S14.pptx
+++ b/curso/pptx/S14.pptx
@@ -473,426 +473,6 @@
     </a:lvl9pPr>
   </p:notesStyle>
 </p:notesMaster>
-</file>
-
-<file path=ppt/notesSlides/notesSlide1.xml><?xml version="1.0" encoding="utf-8"?>
-<p:notes xmlns:a="http://schemas.openxmlformats.org/drawingml/2006/main" xmlns:p="http://schemas.openxmlformats.org/presentationml/2006/main" xmlns:r="http://schemas.openxmlformats.org/officeDocument/2006/relationships">
-  <p:cSld>
-    <p:spTree>
-      <p:nvGrpSpPr>
-        <p:cNvPr id="1" name=""/>
-        <p:cNvGrpSpPr/>
-        <p:nvPr/>
-      </p:nvGrpSpPr>
-      <p:grpSpPr>
-        <a:xfrm>
-          <a:off x="0" y="0"/>
-          <a:ext cx="0" cy="0"/>
-          <a:chOff x="0" y="0"/>
-          <a:chExt cx="0" cy="0"/>
-        </a:xfrm>
-      </p:grpSpPr>
-      <p:sp>
-        <p:nvSpPr>
-          <p:cNvPr id="2" name="Slide Image Placeholder 1"/>
-          <p:cNvSpPr>
-            <a:spLocks noGrp="1"/>
-          </p:cNvSpPr>
-          <p:nvPr>
-            <p:ph type="sldImg" idx="2"/>
-          </p:nvPr>
-        </p:nvSpPr>
-        <p:spPr/>
-      </p:sp>
-      <p:sp>
-        <p:nvSpPr>
-          <p:cNvPr id="3" name="Notes Placeholder 2"/>
-          <p:cNvSpPr>
-            <a:spLocks noGrp="1"/>
-          </p:cNvSpPr>
-          <p:nvPr>
-            <p:ph type="body" idx="3" sz="quarter"/>
-          </p:nvPr>
-        </p:nvSpPr>
-        <p:spPr/>
-        <p:txBody>
-          <a:bodyPr/>
-          <a:lstStyle/>
-          <a:p>
-            <a:r>
-              <a:t>3 minutos. Sin apuntes. Es para recordar, no cuenta para nota.</a:t>
-            </a:r>
-          </a:p>
-        </p:txBody>
-      </p:sp>
-      <p:sp>
-        <p:nvSpPr>
-          <p:cNvPr id="4" name="Slide Number Placeholder 3"/>
-          <p:cNvSpPr>
-            <a:spLocks noGrp="1"/>
-          </p:cNvSpPr>
-          <p:nvPr>
-            <p:ph type="sldNum" idx="5" sz="quarter"/>
-          </p:nvPr>
-        </p:nvSpPr>
-        <p:spPr/>
-      </p:sp>
-    </p:spTree>
-  </p:cSld>
-  <p:clrMapOvr>
-    <a:masterClrMapping/>
-  </p:clrMapOvr>
-</p:notes>
-</file>
-
-<file path=ppt/notesSlides/notesSlide2.xml><?xml version="1.0" encoding="utf-8"?>
-<p:notes xmlns:a="http://schemas.openxmlformats.org/drawingml/2006/main" xmlns:p="http://schemas.openxmlformats.org/presentationml/2006/main" xmlns:r="http://schemas.openxmlformats.org/officeDocument/2006/relationships">
-  <p:cSld>
-    <p:spTree>
-      <p:nvGrpSpPr>
-        <p:cNvPr id="1" name=""/>
-        <p:cNvGrpSpPr/>
-        <p:nvPr/>
-      </p:nvGrpSpPr>
-      <p:grpSpPr>
-        <a:xfrm>
-          <a:off x="0" y="0"/>
-          <a:ext cx="0" cy="0"/>
-          <a:chOff x="0" y="0"/>
-          <a:chExt cx="0" cy="0"/>
-        </a:xfrm>
-      </p:grpSpPr>
-      <p:sp>
-        <p:nvSpPr>
-          <p:cNvPr id="2" name="Slide Image Placeholder 1"/>
-          <p:cNvSpPr>
-            <a:spLocks noGrp="1"/>
-          </p:cNvSpPr>
-          <p:nvPr>
-            <p:ph type="sldImg" idx="2"/>
-          </p:nvPr>
-        </p:nvSpPr>
-        <p:spPr/>
-      </p:sp>
-      <p:sp>
-        <p:nvSpPr>
-          <p:cNvPr id="3" name="Notes Placeholder 2"/>
-          <p:cNvSpPr>
-            <a:spLocks noGrp="1"/>
-          </p:cNvSpPr>
-          <p:nvPr>
-            <p:ph type="body" idx="3" sz="quarter"/>
-          </p:nvPr>
-        </p:nvSpPr>
-        <p:spPr/>
-        <p:txBody>
-          <a:bodyPr/>
-          <a:lstStyle/>
-          <a:p>
-            <a:r>
-              <a:t>3 minutos. Sin apuntes. Es para recordar, no cuenta para nota.</a:t>
-            </a:r>
-          </a:p>
-        </p:txBody>
-      </p:sp>
-      <p:sp>
-        <p:nvSpPr>
-          <p:cNvPr id="4" name="Slide Number Placeholder 3"/>
-          <p:cNvSpPr>
-            <a:spLocks noGrp="1"/>
-          </p:cNvSpPr>
-          <p:nvPr>
-            <p:ph type="sldNum" idx="5" sz="quarter"/>
-          </p:nvPr>
-        </p:nvSpPr>
-        <p:spPr/>
-      </p:sp>
-    </p:spTree>
-  </p:cSld>
-  <p:clrMapOvr>
-    <a:masterClrMapping/>
-  </p:clrMapOvr>
-</p:notes>
-</file>
-
-<file path=ppt/notesSlides/notesSlide3.xml><?xml version="1.0" encoding="utf-8"?>
-<p:notes xmlns:a="http://schemas.openxmlformats.org/drawingml/2006/main" xmlns:p="http://schemas.openxmlformats.org/presentationml/2006/main" xmlns:r="http://schemas.openxmlformats.org/officeDocument/2006/relationships">
-  <p:cSld>
-    <p:spTree>
-      <p:nvGrpSpPr>
-        <p:cNvPr id="1" name=""/>
-        <p:cNvGrpSpPr/>
-        <p:nvPr/>
-      </p:nvGrpSpPr>
-      <p:grpSpPr>
-        <a:xfrm>
-          <a:off x="0" y="0"/>
-          <a:ext cx="0" cy="0"/>
-          <a:chOff x="0" y="0"/>
-          <a:chExt cx="0" cy="0"/>
-        </a:xfrm>
-      </p:grpSpPr>
-      <p:sp>
-        <p:nvSpPr>
-          <p:cNvPr id="2" name="Slide Image Placeholder 1"/>
-          <p:cNvSpPr>
-            <a:spLocks noGrp="1"/>
-          </p:cNvSpPr>
-          <p:nvPr>
-            <p:ph type="sldImg" idx="2"/>
-          </p:nvPr>
-        </p:nvSpPr>
-        <p:spPr/>
-      </p:sp>
-      <p:sp>
-        <p:nvSpPr>
-          <p:cNvPr id="3" name="Notes Placeholder 2"/>
-          <p:cNvSpPr>
-            <a:spLocks noGrp="1"/>
-          </p:cNvSpPr>
-          <p:nvPr>
-            <p:ph type="body" idx="3" sz="quarter"/>
-          </p:nvPr>
-        </p:nvSpPr>
-        <p:spPr/>
-        <p:txBody>
-          <a:bodyPr/>
-          <a:lstStyle/>
-          <a:p>
-            <a:r>
-              <a:t>Nadie tiene que contestar: solo pensarlo.</a:t>
-            </a:r>
-          </a:p>
-        </p:txBody>
-      </p:sp>
-      <p:sp>
-        <p:nvSpPr>
-          <p:cNvPr id="4" name="Slide Number Placeholder 3"/>
-          <p:cNvSpPr>
-            <a:spLocks noGrp="1"/>
-          </p:cNvSpPr>
-          <p:nvPr>
-            <p:ph type="sldNum" idx="5" sz="quarter"/>
-          </p:nvPr>
-        </p:nvSpPr>
-        <p:spPr/>
-      </p:sp>
-    </p:spTree>
-  </p:cSld>
-  <p:clrMapOvr>
-    <a:masterClrMapping/>
-  </p:clrMapOvr>
-</p:notes>
-</file>
-
-<file path=ppt/notesSlides/notesSlide4.xml><?xml version="1.0" encoding="utf-8"?>
-<p:notes xmlns:a="http://schemas.openxmlformats.org/drawingml/2006/main" xmlns:p="http://schemas.openxmlformats.org/presentationml/2006/main" xmlns:r="http://schemas.openxmlformats.org/officeDocument/2006/relationships">
-  <p:cSld>
-    <p:spTree>
-      <p:nvGrpSpPr>
-        <p:cNvPr id="1" name=""/>
-        <p:cNvGrpSpPr/>
-        <p:nvPr/>
-      </p:nvGrpSpPr>
-      <p:grpSpPr>
-        <a:xfrm>
-          <a:off x="0" y="0"/>
-          <a:ext cx="0" cy="0"/>
-          <a:chOff x="0" y="0"/>
-          <a:chExt cx="0" cy="0"/>
-        </a:xfrm>
-      </p:grpSpPr>
-      <p:sp>
-        <p:nvSpPr>
-          <p:cNvPr id="2" name="Slide Image Placeholder 1"/>
-          <p:cNvSpPr>
-            <a:spLocks noGrp="1"/>
-          </p:cNvSpPr>
-          <p:nvPr>
-            <p:ph type="sldImg" idx="2"/>
-          </p:nvPr>
-        </p:nvSpPr>
-        <p:spPr/>
-      </p:sp>
-      <p:sp>
-        <p:nvSpPr>
-          <p:cNvPr id="3" name="Notes Placeholder 2"/>
-          <p:cNvSpPr>
-            <a:spLocks noGrp="1"/>
-          </p:cNvSpPr>
-          <p:nvPr>
-            <p:ph type="body" idx="3" sz="quarter"/>
-          </p:nvPr>
-        </p:nvSpPr>
-        <p:spPr/>
-        <p:txBody>
-          <a:bodyPr/>
-          <a:lstStyle/>
-          <a:p>
-            <a:r>
-              <a:t>Dejar unos segundos para que piensen la respuesta fácil antes de enseñar los pasos.</a:t>
-            </a:r>
-          </a:p>
-        </p:txBody>
-      </p:sp>
-      <p:sp>
-        <p:nvSpPr>
-          <p:cNvPr id="4" name="Slide Number Placeholder 3"/>
-          <p:cNvSpPr>
-            <a:spLocks noGrp="1"/>
-          </p:cNvSpPr>
-          <p:nvPr>
-            <p:ph type="sldNum" idx="5" sz="quarter"/>
-          </p:nvPr>
-        </p:nvSpPr>
-        <p:spPr/>
-      </p:sp>
-    </p:spTree>
-  </p:cSld>
-  <p:clrMapOvr>
-    <a:masterClrMapping/>
-  </p:clrMapOvr>
-</p:notes>
-</file>
-
-<file path=ppt/notesSlides/notesSlide5.xml><?xml version="1.0" encoding="utf-8"?>
-<p:notes xmlns:a="http://schemas.openxmlformats.org/drawingml/2006/main" xmlns:p="http://schemas.openxmlformats.org/presentationml/2006/main" xmlns:r="http://schemas.openxmlformats.org/officeDocument/2006/relationships">
-  <p:cSld>
-    <p:spTree>
-      <p:nvGrpSpPr>
-        <p:cNvPr id="1" name=""/>
-        <p:cNvGrpSpPr/>
-        <p:nvPr/>
-      </p:nvGrpSpPr>
-      <p:grpSpPr>
-        <a:xfrm>
-          <a:off x="0" y="0"/>
-          <a:ext cx="0" cy="0"/>
-          <a:chOff x="0" y="0"/>
-          <a:chExt cx="0" cy="0"/>
-        </a:xfrm>
-      </p:grpSpPr>
-      <p:sp>
-        <p:nvSpPr>
-          <p:cNvPr id="2" name="Slide Image Placeholder 1"/>
-          <p:cNvSpPr>
-            <a:spLocks noGrp="1"/>
-          </p:cNvSpPr>
-          <p:nvPr>
-            <p:ph type="sldImg" idx="2"/>
-          </p:nvPr>
-        </p:nvSpPr>
-        <p:spPr/>
-      </p:sp>
-      <p:sp>
-        <p:nvSpPr>
-          <p:cNvPr id="3" name="Notes Placeholder 2"/>
-          <p:cNvSpPr>
-            <a:spLocks noGrp="1"/>
-          </p:cNvSpPr>
-          <p:nvPr>
-            <p:ph type="body" idx="3" sz="quarter"/>
-          </p:nvPr>
-        </p:nvSpPr>
-        <p:spPr/>
-        <p:txBody>
-          <a:bodyPr/>
-          <a:lstStyle/>
-          <a:p>
-            <a:r>
-              <a:t>Dejar 2 minutos para que lo escriban. La diapositiva siguiente muestra el resumen.</a:t>
-            </a:r>
-          </a:p>
-        </p:txBody>
-      </p:sp>
-      <p:sp>
-        <p:nvSpPr>
-          <p:cNvPr id="4" name="Slide Number Placeholder 3"/>
-          <p:cNvSpPr>
-            <a:spLocks noGrp="1"/>
-          </p:cNvSpPr>
-          <p:nvPr>
-            <p:ph type="sldNum" idx="5" sz="quarter"/>
-          </p:nvPr>
-        </p:nvSpPr>
-        <p:spPr/>
-      </p:sp>
-    </p:spTree>
-  </p:cSld>
-  <p:clrMapOvr>
-    <a:masterClrMapping/>
-  </p:clrMapOvr>
-</p:notes>
-</file>
-
-<file path=ppt/notesSlides/notesSlide6.xml><?xml version="1.0" encoding="utf-8"?>
-<p:notes xmlns:a="http://schemas.openxmlformats.org/drawingml/2006/main" xmlns:p="http://schemas.openxmlformats.org/presentationml/2006/main" xmlns:r="http://schemas.openxmlformats.org/officeDocument/2006/relationships">
-  <p:cSld>
-    <p:spTree>
-      <p:nvGrpSpPr>
-        <p:cNvPr id="1" name=""/>
-        <p:cNvGrpSpPr/>
-        <p:nvPr/>
-      </p:nvGrpSpPr>
-      <p:grpSpPr>
-        <a:xfrm>
-          <a:off x="0" y="0"/>
-          <a:ext cx="0" cy="0"/>
-          <a:chOff x="0" y="0"/>
-          <a:chExt cx="0" cy="0"/>
-        </a:xfrm>
-      </p:grpSpPr>
-      <p:sp>
-        <p:nvSpPr>
-          <p:cNvPr id="2" name="Slide Image Placeholder 1"/>
-          <p:cNvSpPr>
-            <a:spLocks noGrp="1"/>
-          </p:cNvSpPr>
-          <p:nvPr>
-            <p:ph type="sldImg" idx="2"/>
-          </p:nvPr>
-        </p:nvSpPr>
-        <p:spPr/>
-      </p:sp>
-      <p:sp>
-        <p:nvSpPr>
-          <p:cNvPr id="3" name="Notes Placeholder 2"/>
-          <p:cNvSpPr>
-            <a:spLocks noGrp="1"/>
-          </p:cNvSpPr>
-          <p:nvPr>
-            <p:ph type="body" idx="3" sz="quarter"/>
-          </p:nvPr>
-        </p:nvSpPr>
-        <p:spPr/>
-        <p:txBody>
-          <a:bodyPr/>
-          <a:lstStyle/>
-          <a:p>
-            <a:r>
-              <a:t>Buscar: «falacia ad hominem ejemplos» · «falacia tu quoque»</a:t>
-            </a:r>
-          </a:p>
-        </p:txBody>
-      </p:sp>
-      <p:sp>
-        <p:nvSpPr>
-          <p:cNvPr id="4" name="Slide Number Placeholder 3"/>
-          <p:cNvSpPr>
-            <a:spLocks noGrp="1"/>
-          </p:cNvSpPr>
-          <p:nvPr>
-            <p:ph type="sldNum" idx="5" sz="quarter"/>
-          </p:nvPr>
-        </p:nvSpPr>
-        <p:spPr/>
-      </p:sp>
-    </p:spTree>
-  </p:cSld>
-  <p:clrMapOvr>
-    <a:masterClrMapping/>
-  </p:clrMapOvr>
-</p:notes>
 </file>
 
 <file path=ppt/slideLayouts/slideLayout1.xml><?xml version="1.0" encoding="utf-8"?>

--- a/curso/pptx/S14.pptx
+++ b/curso/pptx/S14.pptx
@@ -3801,7 +3801,7 @@
                 </a:solidFill>
                 <a:latin typeface="Nunito Sans"/>
               </a:rPr>
-              <a:t>Omar propone alargar el recreo cinco minutos. Kevin: «Tú qué vas a proponer, si eres nuevo y no sabes ni dónde está el gimnasio».</a:t>
+              <a:t>Una chica propone alargar el recreo cinco minutos. Un chico: «Tú qué vas a proponer, si eres nueva y no sabes ni dónde está el gimnasio».</a:t>
             </a:r>
           </a:p>
         </p:txBody>
@@ -3849,7 +3849,7 @@
                 </a:solidFill>
                 <a:latin typeface="Nunito Sans"/>
               </a:rPr>
-              <a:t>¿Qué propone Omar? Alargar el recreo.</a:t>
+              <a:t>¿Qué propone la chica? Alargar el recreo.</a:t>
             </a:r>
           </a:p>
           <a:p>
@@ -3874,7 +3874,7 @@
                 </a:solidFill>
                 <a:latin typeface="Nunito Sans"/>
               </a:rPr>
-              <a:t>¿Qué responde Kevin? Habla de Omar, no del recreo.</a:t>
+              <a:t>¿Qué responde el chico? Habla de la chica, no del recreo.</a:t>
             </a:r>
           </a:p>
           <a:p>
@@ -3899,7 +3899,7 @@
                 </a:solidFill>
                 <a:latin typeface="Nunito Sans"/>
               </a:rPr>
-              <a:t>¿Qué tiene que ver ser nuevo con la idea? Nada: la idea es buena o mala igual.</a:t>
+              <a:t>¿Qué tiene que ver ser nueva con la idea? Nada: la idea es buena o mala igual.</a:t>
             </a:r>
           </a:p>
           <a:p>
@@ -3924,7 +3924,7 @@
                 </a:solidFill>
                 <a:latin typeface="Nunito Sans"/>
               </a:rPr>
-              <a:t>Conclusión: ataque a la persona. La propuesta de Omar sigue sin respuesta.</a:t>
+              <a:t>Conclusión: ataque a la persona. La propuesta de la chica sigue sin respuesta.</a:t>
             </a:r>
           </a:p>
         </p:txBody>
@@ -4110,7 +4110,7 @@
                 </a:solidFill>
                 <a:latin typeface="Nunito Sans"/>
               </a:rPr>
-              <a:t>La madre de Yasmin: «Deja ya el móvil, llevas tres horas». Yasmin: «¡Pues anda que tú, siempre con el WhatsApp!».</a:t>
+              <a:t>La madre de una chica: «Deja ya el móvil, llevas tres horas». La chica: «¡Pues anda que tú, siempre con el WhatsApp!».</a:t>
             </a:r>
           </a:p>
         </p:txBody>
@@ -4183,7 +4183,7 @@
                 </a:solidFill>
                 <a:latin typeface="Nunito Sans"/>
               </a:rPr>
-              <a:t>¿Qué responde Yasmin? Que su madre también lo usa mucho.</a:t>
+              <a:t>¿Qué responde la chica? Que su madre también lo usa mucho.</a:t>
             </a:r>
           </a:p>
           <a:p>
@@ -5296,7 +5296,7 @@
                 </a:solidFill>
                 <a:latin typeface="Nunito Sans"/>
               </a:rPr>
-              <a:t>Omar, el delegado, pide en clase: «Respetad el turno de palabra». Luego interrumpe a todos. Naiara: «Pides respetar el turno y tú no lo respetas».</a:t>
+              <a:t>Un chico, el delegado, pide en clase: «Respetad el turno de palabra». Luego interrumpe a todos. Una chica: «Pides respetar el turno y tú no lo respetas».</a:t>
             </a:r>
           </a:p>
         </p:txBody>
@@ -5369,7 +5369,7 @@
                 </a:solidFill>
                 <a:latin typeface="Nunito Sans"/>
               </a:rPr>
-              <a:t>Naiara no dice que la norma sea mala. No la usa para librarse de cumplirla.</a:t>
+              <a:t>La chica no dice que la norma sea mala. No la usa para librarse de cumplirla.</a:t>
             </a:r>
           </a:p>
           <a:p>
@@ -5412,7 +5412,7 @@
                 </a:solidFill>
                 <a:latin typeface="Nunito Sans"/>
               </a:rPr>
-              <a:t> real: Omar pide algo que él no hace.</a:t>
+              <a:t> real: el delegado pide algo que él no hace.</a:t>
             </a:r>
           </a:p>
           <a:p>
@@ -7040,7 +7040,7 @@
                 </a:solidFill>
                 <a:latin typeface="Nunito Sans"/>
               </a:rPr>
-              <a:t>Omar propone alargar el recreo cinco minutos. Kevin contesta: «Tú qué vas a proponer, si eres nuevo y no sabes ni dónde está el gimnasio».</a:t>
+              <a:t>Una chica propone alargar el recreo cinco minutos. Un chico contesta: «Tú qué vas a proponer, si eres nueva y no sabes ni dónde está el gimnasio».</a:t>
             </a:r>
           </a:p>
         </p:txBody>
@@ -7079,7 +7079,7 @@
                 </a:solidFill>
                 <a:latin typeface="Nunito Sans"/>
               </a:rPr>
-              <a:t>¿Ha dicho Kevin algo sobre si la idea de Omar es buena?</a:t>
+              <a:t>¿Ha dicho ese chico algo sobre si la idea de la chica es buena?</a:t>
             </a:r>
           </a:p>
         </p:txBody>

--- a/curso/pptx/S14.pptx
+++ b/curso/pptx/S14.pptx
@@ -3537,7 +3537,7 @@
                 </a:solidFill>
                 <a:latin typeface="Nunito Sans"/>
               </a:rPr>
-              <a:t>PENSAMIENTO CRÍTICO · SESIÓN 14 · UNIDAD 3 · FALACIAS I: ATACAR, DESVIAR, EMOCIONAR</a:t>
+              <a:t>PENSAMIENTO CRÍTICO · SESIÓN 14 · UNIDAD 3 · ARGUMENTAR</a:t>
             </a:r>
           </a:p>
         </p:txBody>
@@ -3576,7 +3576,7 @@
                 </a:solidFill>
                 <a:latin typeface="Fredoka"/>
               </a:rPr>
-              <a:t>Ataque a la persona</a:t>
+              <a:t>Reconstruir argumentos</a:t>
             </a:r>
           </a:p>
         </p:txBody>
@@ -3615,7 +3615,7 @@
                 </a:solidFill>
                 <a:latin typeface="Nunito Sans"/>
               </a:rPr>
-              <a:t>Atacar a quien habla, o decirle que él también lo hace, no demuestra que su idea sea falsa.</a:t>
+              <a:t>Reconstruir un argumento es escribirlo ordenado, quitar lo que sobra y descubrir las premisas ocultas que no se dicen.</a:t>
             </a:r>
           </a:p>
         </p:txBody>
@@ -3719,7 +3719,7 @@
                 </a:solidFill>
                 <a:latin typeface="Fredoka"/>
               </a:rPr>
-              <a:t>Caso 1 · El recreo</a:t>
+              <a:t>Caso 1 · Quitar lo que sobra</a:t>
             </a:r>
           </a:p>
         </p:txBody>
@@ -3801,7 +3801,7 @@
                 </a:solidFill>
                 <a:latin typeface="Nunito Sans"/>
               </a:rPr>
-              <a:t>Una chica propone alargar el recreo cinco minutos. Un chico: «Tú qué vas a proponer, si eres nueva y no sabes ni dónde está el gimnasio».</a:t>
+              <a:t>«Tío, en serio, trae mañana la autorización firmada, que sin ella no te dejan subir al autobús de la excursión, ya lo sabes.»</a:t>
             </a:r>
           </a:p>
         </p:txBody>
@@ -3849,7 +3849,25 @@
                 </a:solidFill>
                 <a:latin typeface="Nunito Sans"/>
               </a:rPr>
-              <a:t>¿Qué propone la chica? Alargar el recreo.</a:t>
+              <a:t>¿Qué quiere que acepte? Que traiga mañana la autorización: es la </a:t>
+            </a:r>
+            <a:r>
+              <a:rPr sz="2400" b="1">
+                <a:solidFill>
+                  <a:srgbClr val="1F2A44"/>
+                </a:solidFill>
+                <a:latin typeface="Nunito Sans"/>
+              </a:rPr>
+              <a:t>C</a:t>
+            </a:r>
+            <a:r>
+              <a:rPr sz="2400" b="0">
+                <a:solidFill>
+                  <a:srgbClr val="1F2A44"/>
+                </a:solidFill>
+                <a:latin typeface="Nunito Sans"/>
+              </a:rPr>
+              <a:t>.</a:t>
             </a:r>
           </a:p>
           <a:p>
@@ -3874,7 +3892,25 @@
                 </a:solidFill>
                 <a:latin typeface="Nunito Sans"/>
               </a:rPr>
-              <a:t>¿Qué responde el chico? Habla de la chica, no del recreo.</a:t>
+              <a:t>¿Qué da para apoyarlo? Sin autorización no dejan subir al autobús: es la </a:t>
+            </a:r>
+            <a:r>
+              <a:rPr sz="2400" b="1">
+                <a:solidFill>
+                  <a:srgbClr val="1F2A44"/>
+                </a:solidFill>
+                <a:latin typeface="Nunito Sans"/>
+              </a:rPr>
+              <a:t>P1</a:t>
+            </a:r>
+            <a:r>
+              <a:rPr sz="2400" b="0">
+                <a:solidFill>
+                  <a:srgbClr val="1F2A44"/>
+                </a:solidFill>
+                <a:latin typeface="Nunito Sans"/>
+              </a:rPr>
+              <a:t>.</a:t>
             </a:r>
           </a:p>
           <a:p>
@@ -3899,7 +3935,7 @@
                 </a:solidFill>
                 <a:latin typeface="Nunito Sans"/>
               </a:rPr>
-              <a:t>¿Qué tiene que ver ser nueva con la idea? Nada: la idea es buena o mala igual.</a:t>
+              <a:t>Sobran «tío», «en serio» y «ya lo sabes»: son adornos, no razones.</a:t>
             </a:r>
           </a:p>
           <a:p>
@@ -3924,7 +3960,7 @@
                 </a:solidFill>
                 <a:latin typeface="Nunito Sans"/>
               </a:rPr>
-              <a:t>Conclusión: ataque a la persona. La propuesta de la chica sigue sin respuesta.</a:t>
+              <a:t>Conclusión: P1: sin autorización no subes al autobús. C: trae mañana la autorización.</a:t>
             </a:r>
           </a:p>
         </p:txBody>
@@ -4028,7 +4064,7 @@
                 </a:solidFill>
                 <a:latin typeface="Fredoka"/>
               </a:rPr>
-              <a:t>Caso 2 · «Tú también», en casa</a:t>
+              <a:t>Caso 2 · El portero con gafas</a:t>
             </a:r>
           </a:p>
         </p:txBody>
@@ -4110,7 +4146,7 @@
                 </a:solidFill>
                 <a:latin typeface="Nunito Sans"/>
               </a:rPr>
-              <a:t>La madre de una chica: «Deja ya el móvil, llevas tres horas». La chica: «¡Pues anda que tú, siempre con el WhatsApp!».</a:t>
+              <a:t>«Un chico no puede ser el portero: lleva gafas.»</a:t>
             </a:r>
           </a:p>
         </p:txBody>
@@ -4158,7 +4194,7 @@
                 </a:solidFill>
                 <a:latin typeface="Nunito Sans"/>
               </a:rPr>
-              <a:t>¿Qué dice la madre? Que tres horas de móvil son demasiadas.</a:t>
+              <a:t>C: el chico no puede ser el portero. P1: el chico lleva gafas.</a:t>
             </a:r>
           </a:p>
           <a:p>
@@ -4183,7 +4219,7 @@
                 </a:solidFill>
                 <a:latin typeface="Nunito Sans"/>
               </a:rPr>
-              <a:t>¿Qué responde la chica? Que su madre también lo usa mucho.</a:t>
+              <a:t>¿Qué falta para llegar a la C? Algo así: «quien lleva gafas no puede ser portero».</a:t>
             </a:r>
           </a:p>
           <a:p>
@@ -4208,7 +4244,25 @@
                 </a:solidFill>
                 <a:latin typeface="Nunito Sans"/>
               </a:rPr>
-              <a:t>¿Eso cambia algo? Si la madre también se pasa, el consejo sirve para las dos.</a:t>
+              <a:t>Esa es la </a:t>
+            </a:r>
+            <a:r>
+              <a:rPr sz="2400" b="1">
+                <a:solidFill>
+                  <a:srgbClr val="1F2A44"/>
+                </a:solidFill>
+                <a:latin typeface="Nunito Sans"/>
+              </a:rPr>
+              <a:t>premisa oculta</a:t>
+            </a:r>
+            <a:r>
+              <a:rPr sz="2400" b="0">
+                <a:solidFill>
+                  <a:srgbClr val="1F2A44"/>
+                </a:solidFill>
+                <a:latin typeface="Nunito Sans"/>
+              </a:rPr>
+              <a:t>. Escrita, se ve que es falsa: se puede jugar con gafas deportivas o lentillas.</a:t>
             </a:r>
           </a:p>
           <a:p>
@@ -4233,7 +4287,7 @@
                 </a:solidFill>
                 <a:latin typeface="Nunito Sans"/>
               </a:rPr>
-              <a:t>Conclusión: «tú también». Puede ser cierto, pero no responde a la crítica.</a:t>
+              <a:t>Conclusión: el argumento falla por la premisa que no se decía.</a:t>
             </a:r>
           </a:p>
         </p:txBody>
@@ -4337,7 +4391,7 @@
                 </a:solidFill>
                 <a:latin typeface="Fredoka"/>
               </a:rPr>
-              <a:t>Caso 3 · Cuando la persona sí importa</a:t>
+              <a:t>Caso 3 · Una premisa oculta que sí es verdad</a:t>
             </a:r>
           </a:p>
         </p:txBody>
@@ -4419,7 +4473,7 @@
                 </a:solidFill>
                 <a:latin typeface="Nunito Sans"/>
               </a:rPr>
-              <a:t>Un vídeo dice que unas pastillas quitan el acné en tres días. Quien lo dice es el dueño de la marca que las vende.</a:t>
+              <a:t>«Hoy no hay entrenamiento: el campo está inundado.»</a:t>
             </a:r>
           </a:p>
         </p:txBody>
@@ -4467,7 +4521,7 @@
                 </a:solidFill>
                 <a:latin typeface="Nunito Sans"/>
               </a:rPr>
-              <a:t>¿Habla de la persona? Sí: dice que gana dinero vendiéndolas.</a:t>
+              <a:t>C: hoy no hay entrenamiento. P1: el campo está inundado.</a:t>
             </a:r>
           </a:p>
           <a:p>
@@ -4492,7 +4546,7 @@
                 </a:solidFill>
                 <a:latin typeface="Nunito Sans"/>
               </a:rPr>
-              <a:t>¿Viene a cuento? Sí: quien gana dinero puede exagerar. Es una razón para pedir pruebas.</a:t>
+              <a:t>Premisa oculta: «en un campo inundado no se puede entrenar».</a:t>
             </a:r>
           </a:p>
           <a:p>
@@ -4517,7 +4571,7 @@
                 </a:solidFill>
                 <a:latin typeface="Nunito Sans"/>
               </a:rPr>
-              <a:t>Pero no demuestra que sea falso: solo que su palabra no basta.</a:t>
+              <a:t>¿Es verdad? Sí, es razonable. Aquí la premisa oculta no da problemas.</a:t>
             </a:r>
           </a:p>
           <a:p>
@@ -4542,7 +4596,7 @@
                 </a:solidFill>
                 <a:latin typeface="Nunito Sans"/>
               </a:rPr>
-              <a:t>Conclusión: no es ad hominem. Hablar de la persona vale si afecta a su fiabilidad.</a:t>
+              <a:t>Conclusión: buscar la premisa oculta no sirve para atacar. Sirve para ver si el argumento se sostiene.</a:t>
             </a:r>
           </a:p>
         </p:txBody>
@@ -4646,7 +4700,7 @@
                 </a:solidFill>
                 <a:latin typeface="Fredoka"/>
               </a:rPr>
-              <a:t>No todo es ataque a la persona</a:t>
+              <a:t>Reconstruir con justicia</a:t>
             </a:r>
           </a:p>
         </p:txBody>
@@ -4711,7 +4765,7 @@
                 </a:solidFill>
                 <a:latin typeface="Nunito Sans"/>
               </a:rPr>
-              <a:t>BLOQUE 3 · NO TODO ES ATAQUE A LA PERSONA</a:t>
+              <a:t>BLOQUE 3 · RECONSTRUIR CON JUSTICIA</a:t>
             </a:r>
           </a:p>
         </p:txBody>
@@ -4750,7 +4804,7 @@
                 </a:solidFill>
                 <a:latin typeface="Fredoka"/>
               </a:rPr>
-              <a:t>¿Ataque o dato que viene a cuento?</a:t>
+              <a:t>Al reconstruir el argumento de otro</a:t>
             </a:r>
           </a:p>
         </p:txBody>
@@ -4832,7 +4886,7 @@
                 </a:solidFill>
                 <a:latin typeface="Nunito Sans"/>
               </a:rPr>
-              <a:t>Ataque a la persona</a:t>
+              <a:t>Error</a:t>
             </a:r>
           </a:p>
         </p:txBody>
@@ -4880,7 +4934,7 @@
                 </a:solidFill>
                 <a:latin typeface="Nunito Sans"/>
               </a:rPr>
-              <a:t>«No le hagas caso, es un friki»</a:t>
+              <a:t>Cambiar lo que dijo la otra persona</a:t>
             </a:r>
           </a:p>
           <a:p>
@@ -4905,7 +4959,7 @@
                 </a:solidFill>
                 <a:latin typeface="Nunito Sans"/>
               </a:rPr>
-              <a:t>«Qué sabrá, si es de primero»</a:t>
+              <a:t>Añadir premisas que nadie pensaba</a:t>
             </a:r>
           </a:p>
           <a:p>
@@ -4930,7 +4984,7 @@
                 </a:solidFill>
                 <a:latin typeface="Nunito Sans"/>
               </a:rPr>
-              <a:t>«Tú también lo haces, así que calla»</a:t>
+              <a:t>Dejar insultos como si fueran razones</a:t>
             </a:r>
           </a:p>
         </p:txBody>
@@ -5012,7 +5066,7 @@
                 </a:solidFill>
                 <a:latin typeface="Nunito Sans"/>
               </a:rPr>
-              <a:t>Viene a cuento</a:t>
+              <a:t>Mejor así</a:t>
             </a:r>
           </a:p>
         </p:txBody>
@@ -5060,7 +5114,7 @@
                 </a:solidFill>
                 <a:latin typeface="Nunito Sans"/>
               </a:rPr>
-              <a:t>«Lo vende él: pidamos pruebas»</a:t>
+              <a:t>Respetar lo que dijo</a:t>
             </a:r>
           </a:p>
           <a:p>
@@ -5085,7 +5139,7 @@
                 </a:solidFill>
                 <a:latin typeface="Nunito Sans"/>
               </a:rPr>
-              <a:t>«Ya nos mintió con esto: comprobémoslo»</a:t>
+              <a:t>Añadir solo lo que hace falta</a:t>
             </a:r>
           </a:p>
           <a:p>
@@ -5110,7 +5164,7 @@
                 </a:solidFill>
                 <a:latin typeface="Nunito Sans"/>
               </a:rPr>
-              <a:t>«No es médico: preguntemos a un médico»</a:t>
+              <a:t>Quitar lo que no es una razón</a:t>
             </a:r>
           </a:p>
         </p:txBody>
@@ -5175,7 +5229,7 @@
                 </a:solidFill>
                 <a:latin typeface="Nunito Sans"/>
               </a:rPr>
-              <a:t>CASO TRAMPA · BLOQUE 3 · NO TODO ES ATAQUE A LA PERSONA</a:t>
+              <a:t>CASO TRAMPA · BLOQUE 3 · RECONSTRUIR CON JUSTICIA</a:t>
             </a:r>
           </a:p>
         </p:txBody>
@@ -5214,7 +5268,7 @@
                 </a:solidFill>
                 <a:latin typeface="Fredoka"/>
               </a:rPr>
-              <a:t>⚠ ¿Siempre es «tú también»?</a:t>
+              <a:t>⚠ ¿Qué premisa oculta elijo?</a:t>
             </a:r>
           </a:p>
         </p:txBody>
@@ -5296,7 +5350,7 @@
                 </a:solidFill>
                 <a:latin typeface="Nunito Sans"/>
               </a:rPr>
-              <a:t>Un chico, el delegado, pide en clase: «Respetad el turno de palabra». Luego interrumpe a todos. Una chica: «Pides respetar el turno y tú no lo respetas».</a:t>
+              <a:t>«Un chico no puede llevar la moto de su tío: tiene 13 años.»</a:t>
             </a:r>
           </a:p>
         </p:txBody>
@@ -5344,7 +5398,7 @@
                 </a:solidFill>
                 <a:latin typeface="Nunito Sans"/>
               </a:rPr>
-              <a:t>Le devuelve la crítica. ¿Es la falacia «tú también»?</a:t>
+              <a:t>¿La premisa oculta es «los de 13 años conducen mal»? Entonces el argumento falla, ¿no?</a:t>
             </a:r>
           </a:p>
           <a:p>
@@ -5369,7 +5423,7 @@
                 </a:solidFill>
                 <a:latin typeface="Nunito Sans"/>
               </a:rPr>
-              <a:t>La chica no dice que la norma sea mala. No la usa para librarse de cumplirla.</a:t>
+              <a:t>Esa premisa sería dudosa: no todos los de 13 años conducirían mal.</a:t>
             </a:r>
           </a:p>
           <a:p>
@@ -5394,16 +5448,23 @@
                 </a:solidFill>
                 <a:latin typeface="Nunito Sans"/>
               </a:rPr>
-              <a:t>Señala una </a:t>
-            </a:r>
+              <a:t>Pero otra también lleva a la C, y es verdad: «la ley no deja llevar moto a los 13».</a:t>
+            </a:r>
+          </a:p>
+          <a:p>
+            <a:pPr>
+              <a:spcAft>
+                <a:spcPts val="1080"/>
+              </a:spcAft>
+            </a:pPr>
             <a:r>
               <a:rPr sz="2400" b="1">
                 <a:solidFill>
-                  <a:srgbClr val="1F2A44"/>
-                </a:solidFill>
-                <a:latin typeface="Nunito Sans"/>
-              </a:rPr>
-              <a:t>incoherencia</a:t>
+                  <a:srgbClr val="E8793A"/>
+                </a:solidFill>
+                <a:latin typeface="Nunito Sans"/>
+              </a:rPr>
+              <a:t>4. </a:t>
             </a:r>
             <a:r>
               <a:rPr sz="2400" b="0">
@@ -5412,7 +5473,25 @@
                 </a:solidFill>
                 <a:latin typeface="Nunito Sans"/>
               </a:rPr>
-              <a:t> real: el delegado pide algo que él no hace.</a:t>
+              <a:t>Al reconstruir, elijo la premisa más </a:t>
+            </a:r>
+            <a:r>
+              <a:rPr sz="2400" b="1">
+                <a:solidFill>
+                  <a:srgbClr val="1F2A44"/>
+                </a:solidFill>
+                <a:latin typeface="Nunito Sans"/>
+              </a:rPr>
+              <a:t>razonable</a:t>
+            </a:r>
+            <a:r>
+              <a:rPr sz="2400" b="0">
+                <a:solidFill>
+                  <a:srgbClr val="1F2A44"/>
+                </a:solidFill>
+                <a:latin typeface="Nunito Sans"/>
+              </a:rPr>
+              <a:t>: la que pensaría quien habla.</a:t>
             </a:r>
           </a:p>
           <a:p>
@@ -5428,7 +5507,7 @@
                 </a:solidFill>
                 <a:latin typeface="Nunito Sans"/>
               </a:rPr>
-              <a:t>4. </a:t>
+              <a:t>5. </a:t>
             </a:r>
             <a:r>
               <a:rPr sz="2400" b="0">
@@ -5437,32 +5516,7 @@
                 </a:solidFill>
                 <a:latin typeface="Nunito Sans"/>
               </a:rPr>
-              <a:t>Y eso viene a cuento: un delegado tiene que dar ejemplo.</a:t>
-            </a:r>
-          </a:p>
-          <a:p>
-            <a:pPr>
-              <a:spcAft>
-                <a:spcPts val="1080"/>
-              </a:spcAft>
-            </a:pPr>
-            <a:r>
-              <a:rPr sz="2400" b="1">
-                <a:solidFill>
-                  <a:srgbClr val="E8793A"/>
-                </a:solidFill>
-                <a:latin typeface="Nunito Sans"/>
-              </a:rPr>
-              <a:t>5. </a:t>
-            </a:r>
-            <a:r>
-              <a:rPr sz="2400" b="0">
-                <a:solidFill>
-                  <a:srgbClr val="1F2A44"/>
-                </a:solidFill>
-                <a:latin typeface="Nunito Sans"/>
-              </a:rPr>
-              <a:t>Conclusión: señalar una incoherencia no es falacia. Lo sería decir: «entonces yo tampoco respeto el turno».</a:t>
+              <a:t>Conclusión: si eliges la premisa más débil, atacas un argumento que nadie ha hecho.</a:t>
             </a:r>
           </a:p>
         </p:txBody>
@@ -5718,7 +5772,7 @@
                 </a:solidFill>
                 <a:latin typeface="Nunito Sans"/>
               </a:rPr>
-              <a:t>El ataque a la persona responde a quien habla, no a lo que dice.</a:t>
+              <a:t>Reconstruir es escribir el argumento ordenado: premisas arriba, conclusión abajo.</a:t>
             </a:r>
           </a:p>
           <a:p>
@@ -5743,7 +5797,7 @@
                 </a:solidFill>
                 <a:latin typeface="Nunito Sans"/>
               </a:rPr>
-              <a:t>«Tú también» rechaza un consejo porque quien lo da tampoco lo cumple.</a:t>
+              <a:t>Una premisa oculta no se dice, pero hace falta para llegar a la conclusión.</a:t>
             </a:r>
           </a:p>
           <a:p>
@@ -5768,7 +5822,7 @@
                 </a:solidFill>
                 <a:latin typeface="Nunito Sans"/>
               </a:rPr>
-              <a:t>Hablar de la persona vale solo si afecta a su fiabilidad: intereses, mentiras o saber del tema.</a:t>
+              <a:t>Escribir la premisa oculta ayuda a ver si el argumento se sostiene.</a:t>
             </a:r>
           </a:p>
         </p:txBody>
@@ -5872,7 +5926,7 @@
                 </a:solidFill>
                 <a:latin typeface="Fredoka"/>
               </a:rPr>
-              <a:t>La falacia ad hominem y el «tú también», con ejemplos</a:t>
+              <a:t>Premisas implícitas u ocultas en un argumento</a:t>
             </a:r>
           </a:p>
         </p:txBody>
@@ -5911,7 +5965,7 @@
                 </a:solidFill>
                 <a:latin typeface="Nunito Sans"/>
               </a:rPr>
-              <a:t>Ver más ataques a la persona en discusiones, debates y redes.</a:t>
+              <a:t>Ver más ejemplos de razones que no se dicen pero que sostienen un argumento.</a:t>
             </a:r>
           </a:p>
         </p:txBody>
@@ -6569,7 +6623,7 @@
                 </a:solidFill>
                 <a:latin typeface="Nunito Sans"/>
               </a:rPr>
-              <a:t>Las tres preguntas de una buena razón: ¿es verdad?, ¿viene a ______?, ¿es ______?  (sesión 13)</a:t>
+              <a:t>Un argumento es una ______ apoyada en una o más ______.  (sesión 13)</a:t>
             </a:r>
           </a:p>
           <a:p>
@@ -6594,7 +6648,7 @@
                 </a:solidFill>
                 <a:latin typeface="Nunito Sans"/>
               </a:rPr>
-              <a:t>Las falacias de la unidad 3 atacan, ______ o emocionan.  (sesión 13)</a:t>
+              <a:t>«Por tanto», «así que» y «por eso» suelen ir antes de una ______.  (sesión 13)</a:t>
             </a:r>
           </a:p>
           <a:p>
@@ -6619,7 +6673,7 @@
                 </a:solidFill>
                 <a:latin typeface="Nunito Sans"/>
               </a:rPr>
-              <a:t>Si la razón es ______, el argumento se cae.  (sesión 9)</a:t>
+              <a:t>La prueba ______ es copiar lo que hacen los demás cuando no sabemos qué hacer.  (sesión 9)</a:t>
             </a:r>
           </a:p>
         </p:txBody>
@@ -6771,7 +6825,7 @@
                 </a:solidFill>
                 <a:latin typeface="Nunito Sans"/>
               </a:rPr>
-              <a:t>Las tres preguntas de una buena razón: ¿es verdad?, ¿viene a </a:t>
+              <a:t>Un argumento es una </a:t>
             </a:r>
             <a:r>
               <a:rPr sz="2600" b="1">
@@ -6780,7 +6834,7 @@
                 </a:solidFill>
                 <a:latin typeface="Nunito Sans"/>
               </a:rPr>
-              <a:t>cuento</a:t>
+              <a:t>conclusión</a:t>
             </a:r>
             <a:r>
               <a:rPr sz="2600" b="0">
@@ -6789,7 +6843,7 @@
                 </a:solidFill>
                 <a:latin typeface="Nunito Sans"/>
               </a:rPr>
-              <a:t>?, ¿es </a:t>
+              <a:t> apoyada en una o más </a:t>
             </a:r>
             <a:r>
               <a:rPr sz="2600" b="1">
@@ -6798,7 +6852,7 @@
                 </a:solidFill>
                 <a:latin typeface="Nunito Sans"/>
               </a:rPr>
-              <a:t>suficiente</a:t>
+              <a:t>premisas</a:t>
             </a:r>
             <a:r>
               <a:rPr sz="2600" b="0">
@@ -6807,7 +6861,7 @@
                 </a:solidFill>
                 <a:latin typeface="Nunito Sans"/>
               </a:rPr>
-              <a:t>?  (sesión 13)</a:t>
+              <a:t>.  (sesión 13)</a:t>
             </a:r>
           </a:p>
           <a:p>
@@ -6832,7 +6886,7 @@
                 </a:solidFill>
                 <a:latin typeface="Nunito Sans"/>
               </a:rPr>
-              <a:t>Las falacias de la unidad 3 atacan, </a:t>
+              <a:t>«Por tanto», «así que» y «por eso» suelen ir antes de una </a:t>
             </a:r>
             <a:r>
               <a:rPr sz="2600" b="1">
@@ -6841,7 +6895,7 @@
                 </a:solidFill>
                 <a:latin typeface="Nunito Sans"/>
               </a:rPr>
-              <a:t>desvían</a:t>
+              <a:t>conclusión</a:t>
             </a:r>
             <a:r>
               <a:rPr sz="2600" b="0">
@@ -6850,7 +6904,7 @@
                 </a:solidFill>
                 <a:latin typeface="Nunito Sans"/>
               </a:rPr>
-              <a:t> o emocionan.  (sesión 13)</a:t>
+              <a:t>.  (sesión 13)</a:t>
             </a:r>
           </a:p>
           <a:p>
@@ -6875,7 +6929,7 @@
                 </a:solidFill>
                 <a:latin typeface="Nunito Sans"/>
               </a:rPr>
-              <a:t>Si la razón es </a:t>
+              <a:t>La prueba </a:t>
             </a:r>
             <a:r>
               <a:rPr sz="2600" b="1">
@@ -6884,7 +6938,7 @@
                 </a:solidFill>
                 <a:latin typeface="Nunito Sans"/>
               </a:rPr>
-              <a:t>falsa</a:t>
+              <a:t>social</a:t>
             </a:r>
             <a:r>
               <a:rPr sz="2600" b="0">
@@ -6893,7 +6947,7 @@
                 </a:solidFill>
                 <a:latin typeface="Nunito Sans"/>
               </a:rPr>
-              <a:t>, el argumento se cae.  (sesión 9)</a:t>
+              <a:t> es copiar lo que hacen los demás cuando no sabemos qué hacer.  (sesión 9)</a:t>
             </a:r>
           </a:p>
         </p:txBody>
@@ -7040,7 +7094,7 @@
                 </a:solidFill>
                 <a:latin typeface="Nunito Sans"/>
               </a:rPr>
-              <a:t>Una chica propone alargar el recreo cinco minutos. Un chico contesta: «Tú qué vas a proponer, si eres nueva y no sabes ni dónde está el gimnasio».</a:t>
+              <a:t>«Un chico no puede ser el portero: lleva gafas.»</a:t>
             </a:r>
           </a:p>
         </p:txBody>
@@ -7079,7 +7133,7 @@
                 </a:solidFill>
                 <a:latin typeface="Nunito Sans"/>
               </a:rPr>
-              <a:t>¿Ha dicho ese chico algo sobre si la idea de la chica es buena?</a:t>
+              <a:t>¿Qué está pensando, sin decirlo, quien dice esto?</a:t>
             </a:r>
           </a:p>
         </p:txBody>
@@ -7183,7 +7237,7 @@
                 </a:solidFill>
                 <a:latin typeface="Fredoka"/>
               </a:rPr>
-              <a:t>Atacar a la persona</a:t>
+              <a:t>Ordenar un argumento</a:t>
             </a:r>
           </a:p>
         </p:txBody>
@@ -7248,7 +7302,7 @@
                 </a:solidFill>
                 <a:latin typeface="Nunito Sans"/>
               </a:rPr>
-              <a:t>BLOQUE 1 · ATACAR A LA PERSONA</a:t>
+              <a:t>BLOQUE 1 · ORDENAR UN ARGUMENTO</a:t>
             </a:r>
           </a:p>
         </p:txBody>
@@ -7287,7 +7341,7 @@
                 </a:solidFill>
                 <a:latin typeface="Fredoka"/>
               </a:rPr>
-              <a:t>Ataque a la persona (ad hominem)</a:t>
+              <a:t>Reconstruir</a:t>
             </a:r>
           </a:p>
         </p:txBody>
@@ -7369,7 +7423,25 @@
                 </a:solidFill>
                 <a:latin typeface="Nunito Sans"/>
               </a:rPr>
-              <a:t>Atacar a quien da un argumento en lugar de responder a su argumento.</a:t>
+              <a:t>Reconstruir un argumento es escribirlo </a:t>
+            </a:r>
+            <a:r>
+              <a:rPr sz="2800" b="1">
+                <a:solidFill>
+                  <a:srgbClr val="1F2A44"/>
+                </a:solidFill>
+                <a:latin typeface="Nunito Sans"/>
+              </a:rPr>
+              <a:t>ordenado</a:t>
+            </a:r>
+            <a:r>
+              <a:rPr sz="2800" b="1">
+                <a:solidFill>
+                  <a:srgbClr val="1F2A44"/>
+                </a:solidFill>
+                <a:latin typeface="Nunito Sans"/>
+              </a:rPr>
+              <a:t>: premisas arriba, conclusión abajo.</a:t>
             </a:r>
           </a:p>
         </p:txBody>
@@ -7411,22 +7483,38 @@
               <a:t>• </a:t>
             </a:r>
             <a:r>
+              <a:rPr sz="2800" b="1">
+                <a:solidFill>
+                  <a:srgbClr val="1F2A44"/>
+                </a:solidFill>
+                <a:latin typeface="Nunito Sans"/>
+              </a:rPr>
+              <a:t>P1, P2…</a:t>
+            </a:r>
+            <a:r>
               <a:rPr sz="2800" b="0">
                 <a:solidFill>
                   <a:srgbClr val="1F2A44"/>
                 </a:solidFill>
                 <a:latin typeface="Nunito Sans"/>
               </a:rPr>
-              <a:t>En latín, </a:t>
-            </a:r>
+              <a:t> = las premisas</a:t>
+            </a:r>
+          </a:p>
+          <a:p>
+            <a:pPr>
+              <a:spcAft>
+                <a:spcPts val="1260"/>
+              </a:spcAft>
+            </a:pPr>
             <a:r>
               <a:rPr sz="2800" b="1">
                 <a:solidFill>
-                  <a:srgbClr val="1F2A44"/>
-                </a:solidFill>
-                <a:latin typeface="Nunito Sans"/>
-              </a:rPr>
-              <a:t>ad hominem</a:t>
+                  <a:srgbClr val="E8793A"/>
+                </a:solidFill>
+                <a:latin typeface="Nunito Sans"/>
+              </a:rPr>
+              <a:t>• </a:t>
             </a:r>
             <a:r>
               <a:rPr sz="2800" b="0">
@@ -7435,7 +7523,7 @@
                 </a:solidFill>
                 <a:latin typeface="Nunito Sans"/>
               </a:rPr>
-              <a:t> significa «contra la persona»</a:t>
+              <a:t>Una raya las separa</a:t>
             </a:r>
           </a:p>
           <a:p>
@@ -7454,81 +7542,22 @@
               <a:t>• </a:t>
             </a:r>
             <a:r>
+              <a:rPr sz="2800" b="1">
+                <a:solidFill>
+                  <a:srgbClr val="1F2A44"/>
+                </a:solidFill>
+                <a:latin typeface="Nunito Sans"/>
+              </a:rPr>
+              <a:t>C</a:t>
+            </a:r>
+            <a:r>
               <a:rPr sz="2800" b="0">
                 <a:solidFill>
                   <a:srgbClr val="1F2A44"/>
                 </a:solidFill>
                 <a:latin typeface="Nunito Sans"/>
               </a:rPr>
-              <a:t>Ataca su aspecto, sus notas, su edad, su familia…</a:t>
-            </a:r>
-          </a:p>
-          <a:p>
-            <a:pPr>
-              <a:spcAft>
-                <a:spcPts val="1260"/>
-              </a:spcAft>
-            </a:pPr>
-            <a:r>
-              <a:rPr sz="2800" b="1">
-                <a:solidFill>
-                  <a:srgbClr val="E8793A"/>
-                </a:solidFill>
-                <a:latin typeface="Nunito Sans"/>
-              </a:rPr>
-              <a:t>• </a:t>
-            </a:r>
-            <a:r>
-              <a:rPr sz="2800" b="0">
-                <a:solidFill>
-                  <a:srgbClr val="1F2A44"/>
-                </a:solidFill>
-                <a:latin typeface="Nunito Sans"/>
-              </a:rPr>
-              <a:t>La idea se queda </a:t>
-            </a:r>
-            <a:r>
-              <a:rPr sz="2800" b="1">
-                <a:solidFill>
-                  <a:srgbClr val="1F2A44"/>
-                </a:solidFill>
-                <a:latin typeface="Nunito Sans"/>
-              </a:rPr>
-              <a:t>sin responder</a:t>
-            </a:r>
-          </a:p>
-          <a:p>
-            <a:pPr>
-              <a:spcAft>
-                <a:spcPts val="1260"/>
-              </a:spcAft>
-            </a:pPr>
-            <a:r>
-              <a:rPr sz="2800" b="1">
-                <a:solidFill>
-                  <a:srgbClr val="E8793A"/>
-                </a:solidFill>
-                <a:latin typeface="Nunito Sans"/>
-              </a:rPr>
-              <a:t>• </a:t>
-            </a:r>
-            <a:r>
-              <a:rPr sz="2800" b="0">
-                <a:solidFill>
-                  <a:srgbClr val="1F2A44"/>
-                </a:solidFill>
-                <a:latin typeface="Nunito Sans"/>
-              </a:rPr>
-              <a:t>Pregunta: </a:t>
-            </a:r>
-            <a:r>
-              <a:rPr sz="2800" b="1">
-                <a:solidFill>
-                  <a:srgbClr val="1F2A44"/>
-                </a:solidFill>
-                <a:latin typeface="Nunito Sans"/>
-              </a:rPr>
-              <a:t>¿qué tiene que ver quién lo dice con la idea?</a:t>
+              <a:t> = la conclusión</a:t>
             </a:r>
           </a:p>
         </p:txBody>
@@ -7593,7 +7622,7 @@
                 </a:solidFill>
                 <a:latin typeface="Nunito Sans"/>
               </a:rPr>
-              <a:t>BLOQUE 1 · ATACAR A LA PERSONA</a:t>
+              <a:t>BLOQUE 1 · ORDENAR UN ARGUMENTO</a:t>
             </a:r>
           </a:p>
         </p:txBody>
@@ -7632,103 +7661,21 @@
                 </a:solidFill>
                 <a:latin typeface="Fredoka"/>
               </a:rPr>
-              <a:t>«Tú también» (tu quoque)</a:t>
-            </a:r>
-          </a:p>
-        </p:txBody>
-      </p:sp>
-      <p:sp>
-        <p:nvSpPr>
-          <p:cNvPr id="4" name="Rectangle 3"/>
-          <p:cNvSpPr/>
-          <p:nvPr/>
-        </p:nvSpPr>
-        <p:spPr>
-          <a:xfrm>
-            <a:off x="640000" y="1650000"/>
-            <a:ext cx="10912000" cy="1150000"/>
-          </a:xfrm>
-          <a:prstGeom prst="rect">
-            <a:avLst/>
-          </a:prstGeom>
-          <a:solidFill>
-            <a:srgbClr val="EAF0F7"/>
-          </a:solidFill>
-          <a:ln>
-            <a:noFill/>
-          </a:ln>
-        </p:spPr>
-        <p:style>
-          <a:lnRef idx="1">
-            <a:schemeClr val="accent1"/>
-          </a:lnRef>
-          <a:fillRef idx="3">
-            <a:schemeClr val="accent1"/>
-          </a:fillRef>
-          <a:effectRef idx="2">
-            <a:schemeClr val="accent1"/>
-          </a:effectRef>
-          <a:fontRef idx="minor">
-            <a:schemeClr val="lt1"/>
-          </a:fontRef>
-        </p:style>
-        <p:txBody>
-          <a:bodyPr rtlCol="0" anchor="ctr"/>
-          <a:lstStyle/>
-          <a:p>
-            <a:pPr algn="ctr"/>
-          </a:p>
-        </p:txBody>
-      </p:sp>
-      <p:sp>
-        <p:nvSpPr>
-          <p:cNvPr id="5" name="TextBox 4"/>
+              <a:t>Cuatro pasos para reconstruir</a:t>
+            </a:r>
+          </a:p>
+        </p:txBody>
+      </p:sp>
+      <p:sp>
+        <p:nvSpPr>
+          <p:cNvPr id="4" name="TextBox 3"/>
           <p:cNvSpPr txBox="1"/>
           <p:nvPr/>
         </p:nvSpPr>
         <p:spPr>
           <a:xfrm>
-            <a:off x="840000" y="1730000"/>
-            <a:ext cx="10512000" cy="1000000"/>
-          </a:xfrm>
-          <a:prstGeom prst="rect">
-            <a:avLst/>
-          </a:prstGeom>
-          <a:noFill/>
-        </p:spPr>
-        <p:txBody>
-          <a:bodyPr wrap="square" anchor="ctr">
-            <a:spAutoFit/>
-          </a:bodyPr>
-          <a:lstStyle/>
-          <a:p>
-            <a:pPr>
-              <a:spcAft>
-                <a:spcPts val="1260"/>
-              </a:spcAft>
-            </a:pPr>
-            <a:r>
-              <a:rPr sz="2800" b="1">
-                <a:solidFill>
-                  <a:srgbClr val="1F2A44"/>
-                </a:solidFill>
-                <a:latin typeface="Nunito Sans"/>
-              </a:rPr>
-              <a:t>Rechazar una crítica o un consejo porque quien lo da tampoco lo cumple.</a:t>
-            </a:r>
-          </a:p>
-        </p:txBody>
-      </p:sp>
-      <p:sp>
-        <p:nvSpPr>
-          <p:cNvPr id="6" name="TextBox 5"/>
-          <p:cNvSpPr txBox="1"/>
-          <p:nvPr/>
-        </p:nvSpPr>
-        <p:spPr>
-          <a:xfrm>
-            <a:off x="640000" y="3000000"/>
-            <a:ext cx="10912000" cy="3458000"/>
+            <a:off x="640000" y="1650000"/>
+            <a:ext cx="10912000" cy="4808000"/>
           </a:xfrm>
           <a:prstGeom prst="rect">
             <a:avLst/>
@@ -7762,7 +7709,7 @@
                 </a:solidFill>
                 <a:latin typeface="Nunito Sans"/>
               </a:rPr>
-              <a:t>En latín, </a:t>
+              <a:t>1. Busca la </a:t>
             </a:r>
             <a:r>
               <a:rPr sz="2800" b="1">
@@ -7771,7 +7718,7 @@
                 </a:solidFill>
                 <a:latin typeface="Nunito Sans"/>
               </a:rPr>
-              <a:t>tu quoque</a:t>
+              <a:t>conclusión</a:t>
             </a:r>
             <a:r>
               <a:rPr sz="2800" b="0">
@@ -7780,7 +7727,7 @@
                 </a:solidFill>
                 <a:latin typeface="Nunito Sans"/>
               </a:rPr>
-              <a:t> significa «tú también»</a:t>
+              <a:t>: ¿qué quiere que acepte?</a:t>
             </a:r>
           </a:p>
           <a:p>
@@ -7805,7 +7752,25 @@
                 </a:solidFill>
                 <a:latin typeface="Nunito Sans"/>
               </a:rPr>
-              <a:t>Es un tipo de ataque a la persona</a:t>
+              <a:t>2. Busca las </a:t>
+            </a:r>
+            <a:r>
+              <a:rPr sz="2800" b="1">
+                <a:solidFill>
+                  <a:srgbClr val="1F2A44"/>
+                </a:solidFill>
+                <a:latin typeface="Nunito Sans"/>
+              </a:rPr>
+              <a:t>premisas</a:t>
+            </a:r>
+            <a:r>
+              <a:rPr sz="2800" b="0">
+                <a:solidFill>
+                  <a:srgbClr val="1F2A44"/>
+                </a:solidFill>
+                <a:latin typeface="Nunito Sans"/>
+              </a:rPr>
+              <a:t>: ¿qué da para apoyarlo?</a:t>
             </a:r>
           </a:p>
           <a:p>
@@ -7830,7 +7795,68 @@
                 </a:solidFill>
                 <a:latin typeface="Nunito Sans"/>
               </a:rPr>
-              <a:t>Que alguien no cumpla un consejo no lo hace falso</a:t>
+              <a:t>3. Quita lo que </a:t>
+            </a:r>
+            <a:r>
+              <a:rPr sz="2800" b="1">
+                <a:solidFill>
+                  <a:srgbClr val="1F2A44"/>
+                </a:solidFill>
+                <a:latin typeface="Nunito Sans"/>
+              </a:rPr>
+              <a:t>sobra</a:t>
+            </a:r>
+            <a:r>
+              <a:rPr sz="2800" b="0">
+                <a:solidFill>
+                  <a:srgbClr val="1F2A44"/>
+                </a:solidFill>
+                <a:latin typeface="Nunito Sans"/>
+              </a:rPr>
+              <a:t>: adornos, repeticiones, insultos</a:t>
+            </a:r>
+          </a:p>
+          <a:p>
+            <a:pPr>
+              <a:spcAft>
+                <a:spcPts val="1260"/>
+              </a:spcAft>
+            </a:pPr>
+            <a:r>
+              <a:rPr sz="2800" b="1">
+                <a:solidFill>
+                  <a:srgbClr val="E8793A"/>
+                </a:solidFill>
+                <a:latin typeface="Nunito Sans"/>
+              </a:rPr>
+              <a:t>• </a:t>
+            </a:r>
+            <a:r>
+              <a:rPr sz="2800" b="0">
+                <a:solidFill>
+                  <a:srgbClr val="1F2A44"/>
+                </a:solidFill>
+                <a:latin typeface="Nunito Sans"/>
+              </a:rPr>
+              <a:t>4. Pregunta qué </a:t>
+            </a:r>
+            <a:r>
+              <a:rPr sz="2800" b="1">
+                <a:solidFill>
+                  <a:srgbClr val="1F2A44"/>
+                </a:solidFill>
+                <a:latin typeface="Nunito Sans"/>
+              </a:rPr>
+              <a:t>falta</a:t>
+            </a:r>
+            <a:r>
+              <a:rPr sz="2800" b="0">
+                <a:solidFill>
+                  <a:srgbClr val="1F2A44"/>
+                </a:solidFill>
+                <a:latin typeface="Nunito Sans"/>
+              </a:rPr>
+              <a:t>: ¿hay una premisa oculta?</a:t>
             </a:r>
           </a:p>
         </p:txBody>
@@ -7895,7 +7921,7 @@
                 </a:solidFill>
                 <a:latin typeface="Nunito Sans"/>
               </a:rPr>
-              <a:t>BLOQUE 1 · ATACAR A LA PERSONA</a:t>
+              <a:t>BLOQUE 1 · ORDENAR UN ARGUMENTO</a:t>
             </a:r>
           </a:p>
         </p:txBody>
@@ -7934,221 +7960,218 @@
                 </a:solidFill>
                 <a:latin typeface="Fredoka"/>
               </a:rPr>
-              <a:t>Cómo reconocerlo</a:t>
-            </a:r>
-          </a:p>
-        </p:txBody>
-      </p:sp>
-      <p:graphicFrame>
-        <p:nvGraphicFramePr>
-          <p:cNvPr id="4" name="Table 3"/>
-          <p:cNvGraphicFramePr>
-            <a:graphicFrameLocks noGrp="1"/>
-          </p:cNvGraphicFramePr>
+              <a:t>Premisa oculta</a:t>
+            </a:r>
+          </a:p>
+        </p:txBody>
+      </p:sp>
+      <p:sp>
+        <p:nvSpPr>
+          <p:cNvPr id="4" name="Rectangle 3"/>
+          <p:cNvSpPr/>
           <p:nvPr/>
-        </p:nvGraphicFramePr>
-        <p:xfrm>
-          <a:off x="640000" y="1700000"/>
-          <a:ext cx="10912000" cy="2400000"/>
-        </p:xfrm>
-        <a:graphic>
-          <a:graphicData uri="http://schemas.openxmlformats.org/drawingml/2006/table">
-            <a:tbl>
-              <a:tblPr firstRow="1" bandRow="1">
-                <a:tableStyleId>{5C22544A-7EE6-4342-B048-85BDC9FD1C3A}</a:tableStyleId>
-              </a:tblPr>
-              <a:tblGrid>
-                <a:gridCol w="5456000"/>
-                <a:gridCol w="5456000"/>
-              </a:tblGrid>
-              <a:tr h="600000">
-                <a:tc>
-                  <a:txBody>
-                    <a:bodyPr/>
-                    <a:lstStyle/>
-                    <a:p>
-                      <a:r>
-                        <a:rPr sz="2000" b="1">
-                          <a:solidFill>
-                            <a:srgbClr val="FBF7EF"/>
-                          </a:solidFill>
-                          <a:latin typeface="Fredoka"/>
-                        </a:rPr>
-                        <a:t>Señal</a:t>
-                      </a:r>
-                    </a:p>
-                  </a:txBody>
-                  <a:tcPr>
-                    <a:solidFill>
-                      <a:srgbClr val="1F2A44"/>
-                    </a:solidFill>
-                  </a:tcPr>
-                </a:tc>
-                <a:tc>
-                  <a:txBody>
-                    <a:bodyPr/>
-                    <a:lstStyle/>
-                    <a:p>
-                      <a:r>
-                        <a:rPr sz="2000" b="1">
-                          <a:solidFill>
-                            <a:srgbClr val="FBF7EF"/>
-                          </a:solidFill>
-                          <a:latin typeface="Fredoka"/>
-                        </a:rPr>
-                        <a:t>Ejemplo</a:t>
-                      </a:r>
-                    </a:p>
-                  </a:txBody>
-                  <a:tcPr>
-                    <a:solidFill>
-                      <a:srgbClr val="1F2A44"/>
-                    </a:solidFill>
-                  </a:tcPr>
-                </a:tc>
-              </a:tr>
-              <a:tr h="600000">
-                <a:tc>
-                  <a:txBody>
-                    <a:bodyPr/>
-                    <a:lstStyle/>
-                    <a:p>
-                      <a:r>
-                        <a:rPr sz="2000" b="0">
-                          <a:solidFill>
-                            <a:srgbClr val="1F2A44"/>
-                          </a:solidFill>
-                          <a:latin typeface="Nunito Sans"/>
-                        </a:rPr>
-                        <a:t>Habla de la persona, no de la idea</a:t>
-                      </a:r>
-                    </a:p>
-                  </a:txBody>
-                  <a:tcPr>
-                    <a:solidFill>
-                      <a:srgbClr val="FFFFFF"/>
-                    </a:solidFill>
-                  </a:tcPr>
-                </a:tc>
-                <a:tc>
-                  <a:txBody>
-                    <a:bodyPr/>
-                    <a:lstStyle/>
-                    <a:p>
-                      <a:r>
-                        <a:rPr sz="2000" b="0">
-                          <a:solidFill>
-                            <a:srgbClr val="1F2A44"/>
-                          </a:solidFill>
-                          <a:latin typeface="Nunito Sans"/>
-                        </a:rPr>
-                        <a:t>«¿Tú? Si suspendiste Matemáticas.»</a:t>
-                      </a:r>
-                    </a:p>
-                  </a:txBody>
-                  <a:tcPr>
-                    <a:solidFill>
-                      <a:srgbClr val="FFFFFF"/>
-                    </a:solidFill>
-                  </a:tcPr>
-                </a:tc>
-              </a:tr>
-              <a:tr h="600000">
-                <a:tc>
-                  <a:txBody>
-                    <a:bodyPr/>
-                    <a:lstStyle/>
-                    <a:p>
-                      <a:r>
-                        <a:rPr sz="2000" b="0">
-                          <a:solidFill>
-                            <a:srgbClr val="1F2A44"/>
-                          </a:solidFill>
-                          <a:latin typeface="Nunito Sans"/>
-                        </a:rPr>
-                        <a:t>Usa su edad, su grupo o su aspecto</a:t>
-                      </a:r>
-                    </a:p>
-                  </a:txBody>
-                  <a:tcPr>
-                    <a:solidFill>
-                      <a:srgbClr val="EAF0F7"/>
-                    </a:solidFill>
-                  </a:tcPr>
-                </a:tc>
-                <a:tc>
-                  <a:txBody>
-                    <a:bodyPr/>
-                    <a:lstStyle/>
-                    <a:p>
-                      <a:r>
-                        <a:rPr sz="2000" b="0">
-                          <a:solidFill>
-                            <a:srgbClr val="1F2A44"/>
-                          </a:solidFill>
-                          <a:latin typeface="Nunito Sans"/>
-                        </a:rPr>
-                        <a:t>«Eres un crío, qué sabrás.»</a:t>
-                      </a:r>
-                    </a:p>
-                  </a:txBody>
-                  <a:tcPr>
-                    <a:solidFill>
-                      <a:srgbClr val="EAF0F7"/>
-                    </a:solidFill>
-                  </a:tcPr>
-                </a:tc>
-              </a:tr>
-              <a:tr h="600000">
-                <a:tc>
-                  <a:txBody>
-                    <a:bodyPr/>
-                    <a:lstStyle/>
-                    <a:p>
-                      <a:r>
-                        <a:rPr sz="2000" b="0">
-                          <a:solidFill>
-                            <a:srgbClr val="1F2A44"/>
-                          </a:solidFill>
-                          <a:latin typeface="Nunito Sans"/>
-                        </a:rPr>
-                        <a:t>Le devuelve la crítica</a:t>
-                      </a:r>
-                    </a:p>
-                  </a:txBody>
-                  <a:tcPr>
-                    <a:solidFill>
-                      <a:srgbClr val="FFFFFF"/>
-                    </a:solidFill>
-                  </a:tcPr>
-                </a:tc>
-                <a:tc>
-                  <a:txBody>
-                    <a:bodyPr/>
-                    <a:lstStyle/>
-                    <a:p>
-                      <a:r>
-                        <a:rPr sz="2000" b="0">
-                          <a:solidFill>
-                            <a:srgbClr val="1F2A44"/>
-                          </a:solidFill>
-                          <a:latin typeface="Nunito Sans"/>
-                        </a:rPr>
-                        <a:t>«Pues tú también lo haces.»</a:t>
-                      </a:r>
-                    </a:p>
-                  </a:txBody>
-                  <a:tcPr>
-                    <a:solidFill>
-                      <a:srgbClr val="FFFFFF"/>
-                    </a:solidFill>
-                  </a:tcPr>
-                </a:tc>
-              </a:tr>
-            </a:tbl>
-          </a:graphicData>
-        </a:graphic>
-      </p:graphicFrame>
+        </p:nvSpPr>
+        <p:spPr>
+          <a:xfrm>
+            <a:off x="640000" y="1650000"/>
+            <a:ext cx="10912000" cy="1150000"/>
+          </a:xfrm>
+          <a:prstGeom prst="rect">
+            <a:avLst/>
+          </a:prstGeom>
+          <a:solidFill>
+            <a:srgbClr val="EAF0F7"/>
+          </a:solidFill>
+          <a:ln>
+            <a:noFill/>
+          </a:ln>
+        </p:spPr>
+        <p:style>
+          <a:lnRef idx="1">
+            <a:schemeClr val="accent1"/>
+          </a:lnRef>
+          <a:fillRef idx="3">
+            <a:schemeClr val="accent1"/>
+          </a:fillRef>
+          <a:effectRef idx="2">
+            <a:schemeClr val="accent1"/>
+          </a:effectRef>
+          <a:fontRef idx="minor">
+            <a:schemeClr val="lt1"/>
+          </a:fontRef>
+        </p:style>
+        <p:txBody>
+          <a:bodyPr rtlCol="0" anchor="ctr"/>
+          <a:lstStyle/>
+          <a:p>
+            <a:pPr algn="ctr"/>
+          </a:p>
+        </p:txBody>
+      </p:sp>
+      <p:sp>
+        <p:nvSpPr>
+          <p:cNvPr id="5" name="TextBox 4"/>
+          <p:cNvSpPr txBox="1"/>
+          <p:nvPr/>
+        </p:nvSpPr>
+        <p:spPr>
+          <a:xfrm>
+            <a:off x="840000" y="1730000"/>
+            <a:ext cx="10512000" cy="1000000"/>
+          </a:xfrm>
+          <a:prstGeom prst="rect">
+            <a:avLst/>
+          </a:prstGeom>
+          <a:noFill/>
+        </p:spPr>
+        <p:txBody>
+          <a:bodyPr wrap="square" anchor="ctr">
+            <a:spAutoFit/>
+          </a:bodyPr>
+          <a:lstStyle/>
+          <a:p>
+            <a:pPr>
+              <a:spcAft>
+                <a:spcPts val="1260"/>
+              </a:spcAft>
+            </a:pPr>
+            <a:r>
+              <a:rPr sz="2800" b="1">
+                <a:solidFill>
+                  <a:srgbClr val="1F2A44"/>
+                </a:solidFill>
+                <a:latin typeface="Nunito Sans"/>
+              </a:rPr>
+              <a:t>Una premisa oculta es una razón que </a:t>
+            </a:r>
+            <a:r>
+              <a:rPr sz="2800" b="1">
+                <a:solidFill>
+                  <a:srgbClr val="1F2A44"/>
+                </a:solidFill>
+                <a:latin typeface="Nunito Sans"/>
+              </a:rPr>
+              <a:t>no se dice</a:t>
+            </a:r>
+            <a:r>
+              <a:rPr sz="2800" b="1">
+                <a:solidFill>
+                  <a:srgbClr val="1F2A44"/>
+                </a:solidFill>
+                <a:latin typeface="Nunito Sans"/>
+              </a:rPr>
+              <a:t>, pero que hace falta para llegar a la conclusión.</a:t>
+            </a:r>
+          </a:p>
+        </p:txBody>
+      </p:sp>
+      <p:sp>
+        <p:nvSpPr>
+          <p:cNvPr id="6" name="TextBox 5"/>
+          <p:cNvSpPr txBox="1"/>
+          <p:nvPr/>
+        </p:nvSpPr>
+        <p:spPr>
+          <a:xfrm>
+            <a:off x="640000" y="3000000"/>
+            <a:ext cx="10912000" cy="3458000"/>
+          </a:xfrm>
+          <a:prstGeom prst="rect">
+            <a:avLst/>
+          </a:prstGeom>
+          <a:noFill/>
+        </p:spPr>
+        <p:txBody>
+          <a:bodyPr wrap="square">
+            <a:spAutoFit/>
+          </a:bodyPr>
+          <a:lstStyle/>
+          <a:p>
+            <a:pPr>
+              <a:spcAft>
+                <a:spcPts val="1260"/>
+              </a:spcAft>
+            </a:pPr>
+            <a:r>
+              <a:rPr sz="2800" b="1">
+                <a:solidFill>
+                  <a:srgbClr val="E8793A"/>
+                </a:solidFill>
+                <a:latin typeface="Nunito Sans"/>
+              </a:rPr>
+              <a:t>• </a:t>
+            </a:r>
+            <a:r>
+              <a:rPr sz="2800" b="0">
+                <a:solidFill>
+                  <a:srgbClr val="1F2A44"/>
+                </a:solidFill>
+                <a:latin typeface="Nunito Sans"/>
+              </a:rPr>
+              <a:t>También se llama premisa </a:t>
+            </a:r>
+            <a:r>
+              <a:rPr sz="2800" b="1">
+                <a:solidFill>
+                  <a:srgbClr val="1F2A44"/>
+                </a:solidFill>
+                <a:latin typeface="Nunito Sans"/>
+              </a:rPr>
+              <a:t>implícita</a:t>
+            </a:r>
+          </a:p>
+          <a:p>
+            <a:pPr>
+              <a:spcAft>
+                <a:spcPts val="1260"/>
+              </a:spcAft>
+            </a:pPr>
+            <a:r>
+              <a:rPr sz="2800" b="1">
+                <a:solidFill>
+                  <a:srgbClr val="E8793A"/>
+                </a:solidFill>
+                <a:latin typeface="Nunito Sans"/>
+              </a:rPr>
+              <a:t>• </a:t>
+            </a:r>
+            <a:r>
+              <a:rPr sz="2800" b="0">
+                <a:solidFill>
+                  <a:srgbClr val="1F2A44"/>
+                </a:solidFill>
+                <a:latin typeface="Nunito Sans"/>
+              </a:rPr>
+              <a:t>Pregunta: «¿qué tendría que ser verdad para que esto funcione?»</a:t>
+            </a:r>
+          </a:p>
+          <a:p>
+            <a:pPr>
+              <a:spcAft>
+                <a:spcPts val="1260"/>
+              </a:spcAft>
+            </a:pPr>
+            <a:r>
+              <a:rPr sz="2800" b="1">
+                <a:solidFill>
+                  <a:srgbClr val="E8793A"/>
+                </a:solidFill>
+                <a:latin typeface="Nunito Sans"/>
+              </a:rPr>
+              <a:t>• </a:t>
+            </a:r>
+            <a:r>
+              <a:rPr sz="2800" b="0">
+                <a:solidFill>
+                  <a:srgbClr val="1F2A44"/>
+                </a:solidFill>
+                <a:latin typeface="Nunito Sans"/>
+              </a:rPr>
+              <a:t>A veces es la parte más dudosa</a:t>
+            </a:r>
+          </a:p>
+        </p:txBody>
+      </p:sp>
     </p:spTree>
   </p:cSld>
   <p:clrMapOvr>
